--- a/OPAMPS/OPAMPS.pptx
+++ b/OPAMPS/OPAMPS.pptx
@@ -293,7 +293,7 @@
           <a:p>
             <a:fld id="{43593BB8-F4F4-465B-A20B-CC8F543E0333}" type="datetimeFigureOut">
               <a:rPr lang="en-US" smtClean="0"/>
-              <a:t>5/2/2025</a:t>
+              <a:t>6/13/2025</a:t>
             </a:fld>
             <a:endParaRPr lang="en-US"/>
           </a:p>
@@ -491,7 +491,7 @@
           <a:p>
             <a:fld id="{43593BB8-F4F4-465B-A20B-CC8F543E0333}" type="datetimeFigureOut">
               <a:rPr lang="en-US" smtClean="0"/>
-              <a:t>5/2/2025</a:t>
+              <a:t>6/13/2025</a:t>
             </a:fld>
             <a:endParaRPr lang="en-US"/>
           </a:p>
@@ -699,7 +699,7 @@
           <a:p>
             <a:fld id="{43593BB8-F4F4-465B-A20B-CC8F543E0333}" type="datetimeFigureOut">
               <a:rPr lang="en-US" smtClean="0"/>
-              <a:t>5/2/2025</a:t>
+              <a:t>6/13/2025</a:t>
             </a:fld>
             <a:endParaRPr lang="en-US"/>
           </a:p>
@@ -897,7 +897,7 @@
           <a:p>
             <a:fld id="{43593BB8-F4F4-465B-A20B-CC8F543E0333}" type="datetimeFigureOut">
               <a:rPr lang="en-US" smtClean="0"/>
-              <a:t>5/2/2025</a:t>
+              <a:t>6/13/2025</a:t>
             </a:fld>
             <a:endParaRPr lang="en-US"/>
           </a:p>
@@ -1172,7 +1172,7 @@
           <a:p>
             <a:fld id="{43593BB8-F4F4-465B-A20B-CC8F543E0333}" type="datetimeFigureOut">
               <a:rPr lang="en-US" smtClean="0"/>
-              <a:t>5/2/2025</a:t>
+              <a:t>6/13/2025</a:t>
             </a:fld>
             <a:endParaRPr lang="en-US"/>
           </a:p>
@@ -1437,7 +1437,7 @@
           <a:p>
             <a:fld id="{43593BB8-F4F4-465B-A20B-CC8F543E0333}" type="datetimeFigureOut">
               <a:rPr lang="en-US" smtClean="0"/>
-              <a:t>5/2/2025</a:t>
+              <a:t>6/13/2025</a:t>
             </a:fld>
             <a:endParaRPr lang="en-US"/>
           </a:p>
@@ -1849,7 +1849,7 @@
           <a:p>
             <a:fld id="{43593BB8-F4F4-465B-A20B-CC8F543E0333}" type="datetimeFigureOut">
               <a:rPr lang="en-US" smtClean="0"/>
-              <a:t>5/2/2025</a:t>
+              <a:t>6/13/2025</a:t>
             </a:fld>
             <a:endParaRPr lang="en-US"/>
           </a:p>
@@ -1990,7 +1990,7 @@
           <a:p>
             <a:fld id="{43593BB8-F4F4-465B-A20B-CC8F543E0333}" type="datetimeFigureOut">
               <a:rPr lang="en-US" smtClean="0"/>
-              <a:t>5/2/2025</a:t>
+              <a:t>6/13/2025</a:t>
             </a:fld>
             <a:endParaRPr lang="en-US"/>
           </a:p>
@@ -2103,7 +2103,7 @@
           <a:p>
             <a:fld id="{43593BB8-F4F4-465B-A20B-CC8F543E0333}" type="datetimeFigureOut">
               <a:rPr lang="en-US" smtClean="0"/>
-              <a:t>5/2/2025</a:t>
+              <a:t>6/13/2025</a:t>
             </a:fld>
             <a:endParaRPr lang="en-US"/>
           </a:p>
@@ -2414,7 +2414,7 @@
           <a:p>
             <a:fld id="{43593BB8-F4F4-465B-A20B-CC8F543E0333}" type="datetimeFigureOut">
               <a:rPr lang="en-US" smtClean="0"/>
-              <a:t>5/2/2025</a:t>
+              <a:t>6/13/2025</a:t>
             </a:fld>
             <a:endParaRPr lang="en-US"/>
           </a:p>
@@ -2702,7 +2702,7 @@
           <a:p>
             <a:fld id="{43593BB8-F4F4-465B-A20B-CC8F543E0333}" type="datetimeFigureOut">
               <a:rPr lang="en-US" smtClean="0"/>
-              <a:t>5/2/2025</a:t>
+              <a:t>6/13/2025</a:t>
             </a:fld>
             <a:endParaRPr lang="en-US"/>
           </a:p>
@@ -2943,7 +2943,7 @@
           <a:p>
             <a:fld id="{43593BB8-F4F4-465B-A20B-CC8F543E0333}" type="datetimeFigureOut">
               <a:rPr lang="en-US" smtClean="0"/>
-              <a:t>5/2/2025</a:t>
+              <a:t>6/13/2025</a:t>
             </a:fld>
             <a:endParaRPr lang="en-US"/>
           </a:p>
@@ -3776,8 +3776,8 @@
           </a:p>
         </p:txBody>
       </p:sp>
-      <mc:AlternateContent xmlns:mc="http://schemas.openxmlformats.org/markup-compatibility/2006">
-        <mc:Choice xmlns:a14="http://schemas.microsoft.com/office/drawing/2010/main" Requires="a14">
+      <mc:AlternateContent xmlns:mc="http://schemas.openxmlformats.org/markup-compatibility/2006" xmlns:a14="http://schemas.microsoft.com/office/drawing/2010/main">
+        <mc:Choice Requires="a14">
           <p:sp>
             <p:nvSpPr>
               <p:cNvPr id="10" name="TextBox 9">
@@ -4122,7 +4122,7 @@
             </p:txBody>
           </p:sp>
         </mc:Choice>
-        <mc:Fallback>
+        <mc:Fallback xmlns="">
           <p:sp>
             <p:nvSpPr>
               <p:cNvPr id="10" name="TextBox 9">
@@ -4564,8 +4564,8 @@
           </a:prstGeom>
         </p:spPr>
       </p:pic>
-      <mc:AlternateContent xmlns:mc="http://schemas.openxmlformats.org/markup-compatibility/2006">
-        <mc:Choice xmlns:a14="http://schemas.microsoft.com/office/drawing/2010/main" Requires="a14">
+      <mc:AlternateContent xmlns:mc="http://schemas.openxmlformats.org/markup-compatibility/2006" xmlns:a14="http://schemas.microsoft.com/office/drawing/2010/main">
+        <mc:Choice Requires="a14">
           <p:sp>
             <p:nvSpPr>
               <p:cNvPr id="6" name="TextBox 5">
@@ -5510,7 +5510,7 @@
             </p:txBody>
           </p:sp>
         </mc:Choice>
-        <mc:Fallback>
+        <mc:Fallback xmlns="">
           <p:sp>
             <p:nvSpPr>
               <p:cNvPr id="6" name="TextBox 5">
@@ -5893,8 +5893,8 @@
           </a:prstGeom>
         </p:spPr>
       </p:pic>
-      <mc:AlternateContent xmlns:mc="http://schemas.openxmlformats.org/markup-compatibility/2006">
-        <mc:Choice xmlns:a14="http://schemas.microsoft.com/office/drawing/2010/main" Requires="a14">
+      <mc:AlternateContent xmlns:mc="http://schemas.openxmlformats.org/markup-compatibility/2006" xmlns:a14="http://schemas.microsoft.com/office/drawing/2010/main">
+        <mc:Choice Requires="a14">
           <p:sp>
             <p:nvSpPr>
               <p:cNvPr id="7" name="TextBox 6">
@@ -6999,7 +6999,7 @@
             </p:txBody>
           </p:sp>
         </mc:Choice>
-        <mc:Fallback>
+        <mc:Fallback xmlns="">
           <p:sp>
             <p:nvSpPr>
               <p:cNvPr id="7" name="TextBox 6">
@@ -7409,8 +7409,8 @@
           </a:p>
         </p:txBody>
       </p:sp>
-      <mc:AlternateContent xmlns:mc="http://schemas.openxmlformats.org/markup-compatibility/2006">
-        <mc:Choice xmlns:a14="http://schemas.microsoft.com/office/drawing/2010/main" Requires="a14">
+      <mc:AlternateContent xmlns:mc="http://schemas.openxmlformats.org/markup-compatibility/2006" xmlns:a14="http://schemas.microsoft.com/office/drawing/2010/main">
+        <mc:Choice Requires="a14">
           <p:sp>
             <p:nvSpPr>
               <p:cNvPr id="8" name="TextBox 7">
@@ -7886,7 +7886,7 @@
             </p:txBody>
           </p:sp>
         </mc:Choice>
-        <mc:Fallback>
+        <mc:Fallback xmlns="">
           <p:sp>
             <p:nvSpPr>
               <p:cNvPr id="8" name="TextBox 7">
